--- a/ppt/X3C1.pptx
+++ b/ppt/X3C1.pptx
@@ -2904,15 +2904,7 @@
   <p:cSld>
     <p:bg>
       <p:bgPr>
-        <a:blipFill dpi="0" rotWithShape="1">
-          <a:blip r:embed="rId12">
-            <a:lum/>
-          </a:blip>
-          <a:srcRect/>
-          <a:stretch>
-            <a:fillRect/>
-          </a:stretch>
-        </a:blipFill>
+        <a:noFill/>
         <a:effectLst/>
       </p:bgPr>
     </p:bg>
@@ -3418,20 +3410,6 @@
 <file path=ppt/slides/slide1.xml><?xml version="1.0" encoding="utf-8"?>
 <p:sld xmlns:a="http://schemas.openxmlformats.org/drawingml/2006/main" xmlns:r="http://schemas.openxmlformats.org/officeDocument/2006/relationships" xmlns:p="http://schemas.openxmlformats.org/presentationml/2006/main">
   <p:cSld>
-    <p:bg>
-      <p:bgPr>
-        <a:blipFill dpi="0" rotWithShape="1">
-          <a:blip r:embed="rId1">
-            <a:lum/>
-          </a:blip>
-          <a:srcRect/>
-          <a:stretch>
-            <a:fillRect/>
-          </a:stretch>
-        </a:blipFill>
-        <a:effectLst/>
-      </p:bgPr>
-    </p:bg>
     <p:spTree>
       <p:nvGrpSpPr>
         <p:cNvPr id="1" name=""/>
@@ -3472,13 +3450,11 @@
             <a:r>
               <a:rPr lang="zh-CN" sz="5400" b="1" kern="10">
                 <a:ln w="22225">
-                  <a:solidFill>
-                    <a:srgbClr val="FFFF00"/>
-                  </a:solidFill>
+                  <a:noFill/>
                   <a:round/>
                 </a:ln>
                 <a:solidFill>
-                  <a:srgbClr val="FF0000"/>
+                  <a:schemeClr val="tx1"/>
                 </a:solidFill>
                 <a:effectLst>
                   <a:outerShdw dist="35921" dir="2700000" algn="ctr" rotWithShape="0">
@@ -3492,15 +3468,13 @@
               </a:rPr>
               <a:t>第一章　参考答案</a:t>
             </a:r>
-            <a:endParaRPr lang="zh-CN" sz="4800" b="1" kern="10">
+            <a:endParaRPr lang="zh-CN" sz="5400" b="1" kern="10">
               <a:ln w="22225">
-                <a:solidFill>
-                  <a:srgbClr val="FFFF00"/>
-                </a:solidFill>
+                <a:noFill/>
                 <a:round/>
               </a:ln>
               <a:solidFill>
-                <a:srgbClr val="FF0000"/>
+                <a:schemeClr val="tx1"/>
               </a:solidFill>
               <a:effectLst>
                 <a:outerShdw dist="35921" dir="2700000" algn="ctr" rotWithShape="0">
